--- a/Exame_T3_G04/docs/Apresentacao_do_Programa.pptx
+++ b/Exame_T3_G04/docs/Apresentacao_do_Programa.pptx
@@ -5,7 +5,7 @@
     <p:sldMasterId id="2147483648" r:id="rId1"/>
   </p:sldMasterIdLst>
   <p:notesMasterIdLst>
-    <p:notesMasterId r:id="rId13"/>
+    <p:notesMasterId r:id="rId16"/>
   </p:notesMasterIdLst>
   <p:sldIdLst>
     <p:sldId id="256" r:id="rId2"/>
@@ -18,7 +18,10 @@
     <p:sldId id="401" r:id="rId9"/>
     <p:sldId id="402" r:id="rId10"/>
     <p:sldId id="403" r:id="rId11"/>
-    <p:sldId id="259" r:id="rId12"/>
+    <p:sldId id="407" r:id="rId12"/>
+    <p:sldId id="408" r:id="rId13"/>
+    <p:sldId id="409" r:id="rId14"/>
+    <p:sldId id="259" r:id="rId15"/>
   </p:sldIdLst>
   <p:sldSz cx="18288000" cy="10287000"/>
   <p:notesSz cx="18288000" cy="10287000"/>
@@ -8442,6 +8445,741 @@
       </p:grpSpPr>
       <p:sp>
         <p:nvSpPr>
+          <p:cNvPr id="49" name="Título 48">
+            <a:extLst>
+              <a:ext uri="{FF2B5EF4-FFF2-40B4-BE49-F238E27FC236}">
+                <a16:creationId xmlns:a16="http://schemas.microsoft.com/office/drawing/2014/main" id="{7394770E-6324-4368-94DF-6AAE179D5780}"/>
+              </a:ext>
+            </a:extLst>
+          </p:cNvPr>
+          <p:cNvSpPr>
+            <a:spLocks noGrp="1"/>
+          </p:cNvSpPr>
+          <p:nvPr>
+            <p:ph type="title"/>
+          </p:nvPr>
+        </p:nvSpPr>
+        <p:spPr>
+          <a:xfrm>
+            <a:off x="5638801" y="775601"/>
+            <a:ext cx="9914514" cy="430887"/>
+          </a:xfrm>
+        </p:spPr>
+        <p:txBody>
+          <a:bodyPr wrap="square" lIns="0" tIns="0" rIns="0" bIns="0" anchor="t">
+            <a:spAutoFit/>
+          </a:bodyPr>
+          <a:lstStyle/>
+          <a:p>
+            <a:r>
+              <a:rPr lang="pt-AO" sz="2800" dirty="0">
+                <a:latin typeface="Century Gothic"/>
+              </a:rPr>
+              <a:t>AUTENTICAÇÃO</a:t>
+            </a:r>
+            <a:endParaRPr lang="pt-PT" sz="2800" dirty="0"/>
+          </a:p>
+        </p:txBody>
+      </p:sp>
+      <p:sp>
+        <p:nvSpPr>
+          <p:cNvPr id="2" name="Marcador de Posição do Número do Diapositivo 1">
+            <a:extLst>
+              <a:ext uri="{FF2B5EF4-FFF2-40B4-BE49-F238E27FC236}">
+                <a16:creationId xmlns:a16="http://schemas.microsoft.com/office/drawing/2014/main" id="{0A3CB587-9061-45A3-8E8C-6F5FB1AB6138}"/>
+              </a:ext>
+            </a:extLst>
+          </p:cNvPr>
+          <p:cNvSpPr>
+            <a:spLocks noGrp="1"/>
+          </p:cNvSpPr>
+          <p:nvPr>
+            <p:ph type="sldNum" sz="quarter" idx="7"/>
+          </p:nvPr>
+        </p:nvSpPr>
+        <p:spPr/>
+        <p:txBody>
+          <a:bodyPr/>
+          <a:lstStyle/>
+          <a:p>
+            <a:fld id="{B6F15528-21DE-4FAA-801E-634DDDAF4B2B}" type="slidenum">
+              <a:rPr lang="pt-PT" smtClean="0"/>
+              <a:t>11</a:t>
+            </a:fld>
+            <a:endParaRPr lang="pt-PT"/>
+          </a:p>
+        </p:txBody>
+      </p:sp>
+      <p:sp>
+        <p:nvSpPr>
+          <p:cNvPr id="50" name="Marcador de Posição do Texto 49">
+            <a:extLst>
+              <a:ext uri="{FF2B5EF4-FFF2-40B4-BE49-F238E27FC236}">
+                <a16:creationId xmlns:a16="http://schemas.microsoft.com/office/drawing/2014/main" id="{CAB317BA-2CC3-4C69-81F4-3E838EB0FC80}"/>
+              </a:ext>
+            </a:extLst>
+          </p:cNvPr>
+          <p:cNvSpPr>
+            <a:spLocks noGrp="1"/>
+          </p:cNvSpPr>
+          <p:nvPr>
+            <p:ph type="body" sz="quarter" idx="10"/>
+          </p:nvPr>
+        </p:nvSpPr>
+        <p:spPr/>
+        <p:txBody>
+          <a:bodyPr wrap="square" lIns="0" tIns="0" rIns="0" bIns="0" anchor="t">
+            <a:spAutoFit/>
+          </a:bodyPr>
+          <a:lstStyle/>
+          <a:p>
+            <a:r>
+              <a:rPr lang="pt-AO" dirty="0">
+                <a:latin typeface="Century Gothic"/>
+              </a:rPr>
+              <a:t>Abel Canas</a:t>
+            </a:r>
+            <a:endParaRPr lang="pt-PT" dirty="0">
+              <a:latin typeface="Century Gothic"/>
+            </a:endParaRPr>
+          </a:p>
+        </p:txBody>
+      </p:sp>
+      <p:sp>
+        <p:nvSpPr>
+          <p:cNvPr id="51" name="Marcador de Posição do Texto 50">
+            <a:extLst>
+              <a:ext uri="{FF2B5EF4-FFF2-40B4-BE49-F238E27FC236}">
+                <a16:creationId xmlns:a16="http://schemas.microsoft.com/office/drawing/2014/main" id="{AF35144E-33B5-434C-93F6-5A72E870E85D}"/>
+              </a:ext>
+            </a:extLst>
+          </p:cNvPr>
+          <p:cNvSpPr>
+            <a:spLocks noGrp="1"/>
+          </p:cNvSpPr>
+          <p:nvPr>
+            <p:ph type="body" sz="quarter" idx="12"/>
+          </p:nvPr>
+        </p:nvSpPr>
+        <p:spPr/>
+        <p:txBody>
+          <a:bodyPr wrap="square" lIns="0" tIns="0" rIns="0" bIns="0" anchor="t">
+            <a:spAutoFit/>
+          </a:bodyPr>
+          <a:lstStyle/>
+          <a:p>
+            <a:r>
+              <a:rPr lang="pt-PT" dirty="0">
+                <a:latin typeface="Century Gothic"/>
+              </a:rPr>
+              <a:t>2024/2025</a:t>
+            </a:r>
+          </a:p>
+        </p:txBody>
+      </p:sp>
+      <p:sp>
+        <p:nvSpPr>
+          <p:cNvPr id="10" name="Marcador de Posição de Conteúdo 7">
+            <a:extLst>
+              <a:ext uri="{FF2B5EF4-FFF2-40B4-BE49-F238E27FC236}">
+                <a16:creationId xmlns:a16="http://schemas.microsoft.com/office/drawing/2014/main" id="{B592C2EF-EC1E-13EA-D01F-07B6E26FC9AA}"/>
+              </a:ext>
+            </a:extLst>
+          </p:cNvPr>
+          <p:cNvSpPr>
+            <a:spLocks noGrp="1"/>
+          </p:cNvSpPr>
+          <p:nvPr>
+            <p:ph sz="quarter" idx="13"/>
+          </p:nvPr>
+        </p:nvSpPr>
+        <p:spPr>
+          <a:xfrm>
+            <a:off x="1143000" y="2324100"/>
+            <a:ext cx="15925800" cy="492443"/>
+          </a:xfrm>
+        </p:spPr>
+        <p:txBody>
+          <a:bodyPr wrap="square" lIns="0" tIns="0" rIns="0" bIns="0" anchor="t">
+            <a:spAutoFit/>
+          </a:bodyPr>
+          <a:lstStyle/>
+          <a:p>
+            <a:pPr>
+              <a:spcBef>
+                <a:spcPts val="1200"/>
+              </a:spcBef>
+            </a:pPr>
+            <a:r>
+              <a:rPr lang="pt-AO" sz="3200" b="1" kern="0" dirty="0"/>
+              <a:t>Autenticação</a:t>
+            </a:r>
+            <a:endParaRPr lang="pt-PT" sz="3200" b="1" kern="0" dirty="0"/>
+          </a:p>
+        </p:txBody>
+      </p:sp>
+      <p:pic>
+        <p:nvPicPr>
+          <p:cNvPr id="5" name="Picture 4">
+            <a:extLst>
+              <a:ext uri="{FF2B5EF4-FFF2-40B4-BE49-F238E27FC236}">
+                <a16:creationId xmlns:a16="http://schemas.microsoft.com/office/drawing/2014/main" id="{8E603DAC-DE00-525B-7EE3-CA6DE6A54A29}"/>
+              </a:ext>
+            </a:extLst>
+          </p:cNvPr>
+          <p:cNvPicPr>
+            <a:picLocks noChangeAspect="1"/>
+          </p:cNvPicPr>
+          <p:nvPr/>
+        </p:nvPicPr>
+        <p:blipFill>
+          <a:blip r:embed="rId2"/>
+          <a:stretch>
+            <a:fillRect/>
+          </a:stretch>
+        </p:blipFill>
+        <p:spPr>
+          <a:xfrm>
+            <a:off x="673100" y="3113452"/>
+            <a:ext cx="7184164" cy="3688792"/>
+          </a:xfrm>
+          <a:prstGeom prst="rect">
+            <a:avLst/>
+          </a:prstGeom>
+        </p:spPr>
+      </p:pic>
+      <p:pic>
+        <p:nvPicPr>
+          <p:cNvPr id="7" name="Picture 6">
+            <a:extLst>
+              <a:ext uri="{FF2B5EF4-FFF2-40B4-BE49-F238E27FC236}">
+                <a16:creationId xmlns:a16="http://schemas.microsoft.com/office/drawing/2014/main" id="{29D9CF90-0E6F-F2FC-34E0-4C3C056812E0}"/>
+              </a:ext>
+            </a:extLst>
+          </p:cNvPr>
+          <p:cNvPicPr>
+            <a:picLocks noChangeAspect="1"/>
+          </p:cNvPicPr>
+          <p:nvPr/>
+        </p:nvPicPr>
+        <p:blipFill>
+          <a:blip r:embed="rId3"/>
+          <a:stretch>
+            <a:fillRect/>
+          </a:stretch>
+        </p:blipFill>
+        <p:spPr>
+          <a:xfrm>
+            <a:off x="8303537" y="2570321"/>
+            <a:ext cx="8962113" cy="6553649"/>
+          </a:xfrm>
+          <a:prstGeom prst="rect">
+            <a:avLst/>
+          </a:prstGeom>
+        </p:spPr>
+      </p:pic>
+    </p:spTree>
+    <p:extLst>
+      <p:ext uri="{BB962C8B-B14F-4D97-AF65-F5344CB8AC3E}">
+        <p14:creationId xmlns:p14="http://schemas.microsoft.com/office/powerpoint/2010/main" val="1535890480"/>
+      </p:ext>
+    </p:extLst>
+  </p:cSld>
+  <p:clrMapOvr>
+    <a:masterClrMapping/>
+  </p:clrMapOvr>
+</p:sld>
+</file>
+
+<file path=ppt/slides/slide12.xml><?xml version="1.0" encoding="utf-8"?>
+<p:sld xmlns:a="http://schemas.openxmlformats.org/drawingml/2006/main" xmlns:r="http://schemas.openxmlformats.org/officeDocument/2006/relationships" xmlns:p="http://schemas.openxmlformats.org/presentationml/2006/main">
+  <p:cSld>
+    <p:spTree>
+      <p:nvGrpSpPr>
+        <p:cNvPr id="1" name=""/>
+        <p:cNvGrpSpPr/>
+        <p:nvPr/>
+      </p:nvGrpSpPr>
+      <p:grpSpPr>
+        <a:xfrm>
+          <a:off x="0" y="0"/>
+          <a:ext cx="0" cy="0"/>
+          <a:chOff x="0" y="0"/>
+          <a:chExt cx="0" cy="0"/>
+        </a:xfrm>
+      </p:grpSpPr>
+      <p:sp>
+        <p:nvSpPr>
+          <p:cNvPr id="49" name="Título 48">
+            <a:extLst>
+              <a:ext uri="{FF2B5EF4-FFF2-40B4-BE49-F238E27FC236}">
+                <a16:creationId xmlns:a16="http://schemas.microsoft.com/office/drawing/2014/main" id="{7394770E-6324-4368-94DF-6AAE179D5780}"/>
+              </a:ext>
+            </a:extLst>
+          </p:cNvPr>
+          <p:cNvSpPr>
+            <a:spLocks noGrp="1"/>
+          </p:cNvSpPr>
+          <p:nvPr>
+            <p:ph type="title"/>
+          </p:nvPr>
+        </p:nvSpPr>
+        <p:spPr>
+          <a:xfrm>
+            <a:off x="5638801" y="775601"/>
+            <a:ext cx="9914514" cy="430887"/>
+          </a:xfrm>
+        </p:spPr>
+        <p:txBody>
+          <a:bodyPr wrap="square" lIns="0" tIns="0" rIns="0" bIns="0" anchor="t">
+            <a:spAutoFit/>
+          </a:bodyPr>
+          <a:lstStyle/>
+          <a:p>
+            <a:r>
+              <a:rPr lang="pt-AO" sz="2800" dirty="0">
+                <a:latin typeface="Century Gothic"/>
+              </a:rPr>
+              <a:t>MENSAGENS</a:t>
+            </a:r>
+            <a:endParaRPr lang="pt-PT" sz="2800" dirty="0"/>
+          </a:p>
+        </p:txBody>
+      </p:sp>
+      <p:sp>
+        <p:nvSpPr>
+          <p:cNvPr id="2" name="Marcador de Posição do Número do Diapositivo 1">
+            <a:extLst>
+              <a:ext uri="{FF2B5EF4-FFF2-40B4-BE49-F238E27FC236}">
+                <a16:creationId xmlns:a16="http://schemas.microsoft.com/office/drawing/2014/main" id="{0A3CB587-9061-45A3-8E8C-6F5FB1AB6138}"/>
+              </a:ext>
+            </a:extLst>
+          </p:cNvPr>
+          <p:cNvSpPr>
+            <a:spLocks noGrp="1"/>
+          </p:cNvSpPr>
+          <p:nvPr>
+            <p:ph type="sldNum" sz="quarter" idx="7"/>
+          </p:nvPr>
+        </p:nvSpPr>
+        <p:spPr/>
+        <p:txBody>
+          <a:bodyPr/>
+          <a:lstStyle/>
+          <a:p>
+            <a:fld id="{B6F15528-21DE-4FAA-801E-634DDDAF4B2B}" type="slidenum">
+              <a:rPr lang="pt-PT" smtClean="0"/>
+              <a:t>12</a:t>
+            </a:fld>
+            <a:endParaRPr lang="pt-PT"/>
+          </a:p>
+        </p:txBody>
+      </p:sp>
+      <p:sp>
+        <p:nvSpPr>
+          <p:cNvPr id="50" name="Marcador de Posição do Texto 49">
+            <a:extLst>
+              <a:ext uri="{FF2B5EF4-FFF2-40B4-BE49-F238E27FC236}">
+                <a16:creationId xmlns:a16="http://schemas.microsoft.com/office/drawing/2014/main" id="{CAB317BA-2CC3-4C69-81F4-3E838EB0FC80}"/>
+              </a:ext>
+            </a:extLst>
+          </p:cNvPr>
+          <p:cNvSpPr>
+            <a:spLocks noGrp="1"/>
+          </p:cNvSpPr>
+          <p:nvPr>
+            <p:ph type="body" sz="quarter" idx="10"/>
+          </p:nvPr>
+        </p:nvSpPr>
+        <p:spPr/>
+        <p:txBody>
+          <a:bodyPr wrap="square" lIns="0" tIns="0" rIns="0" bIns="0" anchor="t">
+            <a:spAutoFit/>
+          </a:bodyPr>
+          <a:lstStyle/>
+          <a:p>
+            <a:r>
+              <a:rPr lang="pt-AO" dirty="0">
+                <a:latin typeface="Century Gothic"/>
+              </a:rPr>
+              <a:t>Abel Canas</a:t>
+            </a:r>
+            <a:endParaRPr lang="pt-PT" dirty="0">
+              <a:latin typeface="Century Gothic"/>
+            </a:endParaRPr>
+          </a:p>
+        </p:txBody>
+      </p:sp>
+      <p:sp>
+        <p:nvSpPr>
+          <p:cNvPr id="51" name="Marcador de Posição do Texto 50">
+            <a:extLst>
+              <a:ext uri="{FF2B5EF4-FFF2-40B4-BE49-F238E27FC236}">
+                <a16:creationId xmlns:a16="http://schemas.microsoft.com/office/drawing/2014/main" id="{AF35144E-33B5-434C-93F6-5A72E870E85D}"/>
+              </a:ext>
+            </a:extLst>
+          </p:cNvPr>
+          <p:cNvSpPr>
+            <a:spLocks noGrp="1"/>
+          </p:cNvSpPr>
+          <p:nvPr>
+            <p:ph type="body" sz="quarter" idx="12"/>
+          </p:nvPr>
+        </p:nvSpPr>
+        <p:spPr/>
+        <p:txBody>
+          <a:bodyPr wrap="square" lIns="0" tIns="0" rIns="0" bIns="0" anchor="t">
+            <a:spAutoFit/>
+          </a:bodyPr>
+          <a:lstStyle/>
+          <a:p>
+            <a:r>
+              <a:rPr lang="pt-PT" dirty="0">
+                <a:latin typeface="Century Gothic"/>
+              </a:rPr>
+              <a:t>2024/2025</a:t>
+            </a:r>
+          </a:p>
+        </p:txBody>
+      </p:sp>
+      <p:sp>
+        <p:nvSpPr>
+          <p:cNvPr id="10" name="Marcador de Posição de Conteúdo 7">
+            <a:extLst>
+              <a:ext uri="{FF2B5EF4-FFF2-40B4-BE49-F238E27FC236}">
+                <a16:creationId xmlns:a16="http://schemas.microsoft.com/office/drawing/2014/main" id="{B592C2EF-EC1E-13EA-D01F-07B6E26FC9AA}"/>
+              </a:ext>
+            </a:extLst>
+          </p:cNvPr>
+          <p:cNvSpPr>
+            <a:spLocks noGrp="1"/>
+          </p:cNvSpPr>
+          <p:nvPr>
+            <p:ph sz="quarter" idx="13"/>
+          </p:nvPr>
+        </p:nvSpPr>
+        <p:spPr>
+          <a:xfrm>
+            <a:off x="1143000" y="2324100"/>
+            <a:ext cx="15925800" cy="492443"/>
+          </a:xfrm>
+        </p:spPr>
+        <p:txBody>
+          <a:bodyPr wrap="square" lIns="0" tIns="0" rIns="0" bIns="0" anchor="t">
+            <a:spAutoFit/>
+          </a:bodyPr>
+          <a:lstStyle/>
+          <a:p>
+            <a:pPr>
+              <a:spcBef>
+                <a:spcPts val="1200"/>
+              </a:spcBef>
+            </a:pPr>
+            <a:r>
+              <a:rPr lang="pt-AO" sz="3200" b="1" kern="0" dirty="0"/>
+              <a:t>Enviar mensagem para uma Equipa</a:t>
+            </a:r>
+            <a:endParaRPr lang="pt-PT" sz="3200" b="1" kern="0" dirty="0"/>
+          </a:p>
+        </p:txBody>
+      </p:sp>
+      <p:pic>
+        <p:nvPicPr>
+          <p:cNvPr id="4" name="Picture 3">
+            <a:extLst>
+              <a:ext uri="{FF2B5EF4-FFF2-40B4-BE49-F238E27FC236}">
+                <a16:creationId xmlns:a16="http://schemas.microsoft.com/office/drawing/2014/main" id="{DEA3D44C-4EA6-21AF-55B1-C0D1C1A1C0F8}"/>
+              </a:ext>
+            </a:extLst>
+          </p:cNvPr>
+          <p:cNvPicPr>
+            <a:picLocks noChangeAspect="1"/>
+          </p:cNvPicPr>
+          <p:nvPr/>
+        </p:nvPicPr>
+        <p:blipFill>
+          <a:blip r:embed="rId2"/>
+          <a:stretch>
+            <a:fillRect/>
+          </a:stretch>
+        </p:blipFill>
+        <p:spPr>
+          <a:xfrm>
+            <a:off x="3769112" y="2966981"/>
+            <a:ext cx="9233210" cy="6544417"/>
+          </a:xfrm>
+          <a:prstGeom prst="rect">
+            <a:avLst/>
+          </a:prstGeom>
+        </p:spPr>
+      </p:pic>
+    </p:spTree>
+    <p:extLst>
+      <p:ext uri="{BB962C8B-B14F-4D97-AF65-F5344CB8AC3E}">
+        <p14:creationId xmlns:p14="http://schemas.microsoft.com/office/powerpoint/2010/main" val="1947976688"/>
+      </p:ext>
+    </p:extLst>
+  </p:cSld>
+  <p:clrMapOvr>
+    <a:masterClrMapping/>
+  </p:clrMapOvr>
+</p:sld>
+</file>
+
+<file path=ppt/slides/slide13.xml><?xml version="1.0" encoding="utf-8"?>
+<p:sld xmlns:a="http://schemas.openxmlformats.org/drawingml/2006/main" xmlns:r="http://schemas.openxmlformats.org/officeDocument/2006/relationships" xmlns:p="http://schemas.openxmlformats.org/presentationml/2006/main">
+  <p:cSld>
+    <p:spTree>
+      <p:nvGrpSpPr>
+        <p:cNvPr id="1" name=""/>
+        <p:cNvGrpSpPr/>
+        <p:nvPr/>
+      </p:nvGrpSpPr>
+      <p:grpSpPr>
+        <a:xfrm>
+          <a:off x="0" y="0"/>
+          <a:ext cx="0" cy="0"/>
+          <a:chOff x="0" y="0"/>
+          <a:chExt cx="0" cy="0"/>
+        </a:xfrm>
+      </p:grpSpPr>
+      <p:sp>
+        <p:nvSpPr>
+          <p:cNvPr id="49" name="Título 48">
+            <a:extLst>
+              <a:ext uri="{FF2B5EF4-FFF2-40B4-BE49-F238E27FC236}">
+                <a16:creationId xmlns:a16="http://schemas.microsoft.com/office/drawing/2014/main" id="{7394770E-6324-4368-94DF-6AAE179D5780}"/>
+              </a:ext>
+            </a:extLst>
+          </p:cNvPr>
+          <p:cNvSpPr>
+            <a:spLocks noGrp="1"/>
+          </p:cNvSpPr>
+          <p:nvPr>
+            <p:ph type="title"/>
+          </p:nvPr>
+        </p:nvSpPr>
+        <p:spPr>
+          <a:xfrm>
+            <a:off x="5638801" y="775601"/>
+            <a:ext cx="9914514" cy="430887"/>
+          </a:xfrm>
+        </p:spPr>
+        <p:txBody>
+          <a:bodyPr wrap="square" lIns="0" tIns="0" rIns="0" bIns="0" anchor="t">
+            <a:spAutoFit/>
+          </a:bodyPr>
+          <a:lstStyle/>
+          <a:p>
+            <a:r>
+              <a:rPr lang="pt-AO" sz="2800" dirty="0">
+                <a:latin typeface="Century Gothic"/>
+              </a:rPr>
+              <a:t>MENSAGENS</a:t>
+            </a:r>
+            <a:endParaRPr lang="pt-PT" sz="2800" dirty="0"/>
+          </a:p>
+        </p:txBody>
+      </p:sp>
+      <p:sp>
+        <p:nvSpPr>
+          <p:cNvPr id="2" name="Marcador de Posição do Número do Diapositivo 1">
+            <a:extLst>
+              <a:ext uri="{FF2B5EF4-FFF2-40B4-BE49-F238E27FC236}">
+                <a16:creationId xmlns:a16="http://schemas.microsoft.com/office/drawing/2014/main" id="{0A3CB587-9061-45A3-8E8C-6F5FB1AB6138}"/>
+              </a:ext>
+            </a:extLst>
+          </p:cNvPr>
+          <p:cNvSpPr>
+            <a:spLocks noGrp="1"/>
+          </p:cNvSpPr>
+          <p:nvPr>
+            <p:ph type="sldNum" sz="quarter" idx="7"/>
+          </p:nvPr>
+        </p:nvSpPr>
+        <p:spPr/>
+        <p:txBody>
+          <a:bodyPr/>
+          <a:lstStyle/>
+          <a:p>
+            <a:fld id="{B6F15528-21DE-4FAA-801E-634DDDAF4B2B}" type="slidenum">
+              <a:rPr lang="pt-PT" smtClean="0"/>
+              <a:t>13</a:t>
+            </a:fld>
+            <a:endParaRPr lang="pt-PT"/>
+          </a:p>
+        </p:txBody>
+      </p:sp>
+      <p:sp>
+        <p:nvSpPr>
+          <p:cNvPr id="50" name="Marcador de Posição do Texto 49">
+            <a:extLst>
+              <a:ext uri="{FF2B5EF4-FFF2-40B4-BE49-F238E27FC236}">
+                <a16:creationId xmlns:a16="http://schemas.microsoft.com/office/drawing/2014/main" id="{CAB317BA-2CC3-4C69-81F4-3E838EB0FC80}"/>
+              </a:ext>
+            </a:extLst>
+          </p:cNvPr>
+          <p:cNvSpPr>
+            <a:spLocks noGrp="1"/>
+          </p:cNvSpPr>
+          <p:nvPr>
+            <p:ph type="body" sz="quarter" idx="10"/>
+          </p:nvPr>
+        </p:nvSpPr>
+        <p:spPr/>
+        <p:txBody>
+          <a:bodyPr wrap="square" lIns="0" tIns="0" rIns="0" bIns="0" anchor="t">
+            <a:spAutoFit/>
+          </a:bodyPr>
+          <a:lstStyle/>
+          <a:p>
+            <a:r>
+              <a:rPr lang="pt-AO" dirty="0">
+                <a:latin typeface="Century Gothic"/>
+              </a:rPr>
+              <a:t>Abel Canas</a:t>
+            </a:r>
+            <a:endParaRPr lang="pt-PT" dirty="0">
+              <a:latin typeface="Century Gothic"/>
+            </a:endParaRPr>
+          </a:p>
+        </p:txBody>
+      </p:sp>
+      <p:sp>
+        <p:nvSpPr>
+          <p:cNvPr id="51" name="Marcador de Posição do Texto 50">
+            <a:extLst>
+              <a:ext uri="{FF2B5EF4-FFF2-40B4-BE49-F238E27FC236}">
+                <a16:creationId xmlns:a16="http://schemas.microsoft.com/office/drawing/2014/main" id="{AF35144E-33B5-434C-93F6-5A72E870E85D}"/>
+              </a:ext>
+            </a:extLst>
+          </p:cNvPr>
+          <p:cNvSpPr>
+            <a:spLocks noGrp="1"/>
+          </p:cNvSpPr>
+          <p:nvPr>
+            <p:ph type="body" sz="quarter" idx="12"/>
+          </p:nvPr>
+        </p:nvSpPr>
+        <p:spPr/>
+        <p:txBody>
+          <a:bodyPr wrap="square" lIns="0" tIns="0" rIns="0" bIns="0" anchor="t">
+            <a:spAutoFit/>
+          </a:bodyPr>
+          <a:lstStyle/>
+          <a:p>
+            <a:r>
+              <a:rPr lang="pt-PT" dirty="0">
+                <a:latin typeface="Century Gothic"/>
+              </a:rPr>
+              <a:t>2024/2025</a:t>
+            </a:r>
+          </a:p>
+        </p:txBody>
+      </p:sp>
+      <p:sp>
+        <p:nvSpPr>
+          <p:cNvPr id="10" name="Marcador de Posição de Conteúdo 7">
+            <a:extLst>
+              <a:ext uri="{FF2B5EF4-FFF2-40B4-BE49-F238E27FC236}">
+                <a16:creationId xmlns:a16="http://schemas.microsoft.com/office/drawing/2014/main" id="{B592C2EF-EC1E-13EA-D01F-07B6E26FC9AA}"/>
+              </a:ext>
+            </a:extLst>
+          </p:cNvPr>
+          <p:cNvSpPr>
+            <a:spLocks noGrp="1"/>
+          </p:cNvSpPr>
+          <p:nvPr>
+            <p:ph sz="quarter" idx="13"/>
+          </p:nvPr>
+        </p:nvSpPr>
+        <p:spPr>
+          <a:xfrm>
+            <a:off x="1143000" y="2324100"/>
+            <a:ext cx="15925800" cy="492443"/>
+          </a:xfrm>
+        </p:spPr>
+        <p:txBody>
+          <a:bodyPr wrap="square" lIns="0" tIns="0" rIns="0" bIns="0" anchor="t">
+            <a:spAutoFit/>
+          </a:bodyPr>
+          <a:lstStyle/>
+          <a:p>
+            <a:pPr>
+              <a:spcBef>
+                <a:spcPts val="1200"/>
+              </a:spcBef>
+            </a:pPr>
+            <a:r>
+              <a:rPr lang="pt-AO" sz="3200" b="1" kern="0" dirty="0"/>
+              <a:t>Receber mensagem de uma Equipa</a:t>
+            </a:r>
+            <a:endParaRPr lang="pt-PT" sz="3200" b="1" kern="0" dirty="0"/>
+          </a:p>
+        </p:txBody>
+      </p:sp>
+      <p:pic>
+        <p:nvPicPr>
+          <p:cNvPr id="5" name="Picture 4">
+            <a:extLst>
+              <a:ext uri="{FF2B5EF4-FFF2-40B4-BE49-F238E27FC236}">
+                <a16:creationId xmlns:a16="http://schemas.microsoft.com/office/drawing/2014/main" id="{799C6418-5AD7-1590-D673-70C3E8C0C3B0}"/>
+              </a:ext>
+            </a:extLst>
+          </p:cNvPr>
+          <p:cNvPicPr>
+            <a:picLocks noChangeAspect="1"/>
+          </p:cNvPicPr>
+          <p:nvPr/>
+        </p:nvPicPr>
+        <p:blipFill>
+          <a:blip r:embed="rId2"/>
+          <a:stretch>
+            <a:fillRect/>
+          </a:stretch>
+        </p:blipFill>
+        <p:spPr>
+          <a:xfrm>
+            <a:off x="2230244" y="2986538"/>
+            <a:ext cx="12287645" cy="6448643"/>
+          </a:xfrm>
+          <a:prstGeom prst="rect">
+            <a:avLst/>
+          </a:prstGeom>
+        </p:spPr>
+      </p:pic>
+    </p:spTree>
+    <p:extLst>
+      <p:ext uri="{BB962C8B-B14F-4D97-AF65-F5344CB8AC3E}">
+        <p14:creationId xmlns:p14="http://schemas.microsoft.com/office/powerpoint/2010/main" val="325553444"/>
+      </p:ext>
+    </p:extLst>
+  </p:cSld>
+  <p:clrMapOvr>
+    <a:masterClrMapping/>
+  </p:clrMapOvr>
+</p:sld>
+</file>
+
+<file path=ppt/slides/slide14.xml><?xml version="1.0" encoding="utf-8"?>
+<p:sld xmlns:a="http://schemas.openxmlformats.org/drawingml/2006/main" xmlns:r="http://schemas.openxmlformats.org/officeDocument/2006/relationships" xmlns:p="http://schemas.openxmlformats.org/presentationml/2006/main">
+  <p:cSld>
+    <p:spTree>
+      <p:nvGrpSpPr>
+        <p:cNvPr id="1" name=""/>
+        <p:cNvGrpSpPr/>
+        <p:nvPr/>
+      </p:nvGrpSpPr>
+      <p:grpSpPr>
+        <a:xfrm>
+          <a:off x="0" y="0"/>
+          <a:ext cx="0" cy="0"/>
+          <a:chOff x="0" y="0"/>
+          <a:chExt cx="0" cy="0"/>
+        </a:xfrm>
+      </p:grpSpPr>
+      <p:sp>
+        <p:nvSpPr>
           <p:cNvPr id="2" name="object 2"/>
           <p:cNvSpPr txBox="1">
             <a:spLocks noGrp="1"/>
@@ -8691,7 +9429,7 @@
           <a:p>
             <a:fld id="{B6F15528-21DE-4FAA-801E-634DDDAF4B2B}" type="slidenum">
               <a:rPr lang="pt-PT" smtClean="0"/>
-              <a:t>11</a:t>
+              <a:t>14</a:t>
             </a:fld>
             <a:endParaRPr lang="pt-PT" dirty="0"/>
           </a:p>
@@ -8925,7 +9663,7 @@
         <p:spPr>
           <a:xfrm>
             <a:off x="1143000" y="3160617"/>
-            <a:ext cx="15091911" cy="3539430"/>
+            <a:ext cx="15091911" cy="4524315"/>
           </a:xfrm>
           <a:prstGeom prst="rect">
             <a:avLst/>
@@ -9043,6 +9781,30 @@
                 <a:latin typeface="Century Gothic" panose="020B0502020202020204" pitchFamily="34" charset="0"/>
               </a:rPr>
               <a:t>Diagrama de Caso de Uso</a:t>
+            </a:r>
+          </a:p>
+          <a:p>
+            <a:pPr marL="457200" indent="-457200">
+              <a:buFont typeface="Arial" panose="020B0604020202020204" pitchFamily="34" charset="0"/>
+              <a:buChar char="•"/>
+            </a:pPr>
+            <a:r>
+              <a:rPr lang="pt-AO" sz="3200" dirty="0">
+                <a:latin typeface="Century Gothic" panose="020B0502020202020204" pitchFamily="34" charset="0"/>
+              </a:rPr>
+              <a:t>Autenticação</a:t>
+            </a:r>
+          </a:p>
+          <a:p>
+            <a:pPr marL="457200" indent="-457200">
+              <a:buFont typeface="Arial" panose="020B0604020202020204" pitchFamily="34" charset="0"/>
+              <a:buChar char="•"/>
+            </a:pPr>
+            <a:r>
+              <a:rPr lang="pt-AO" sz="3200" dirty="0">
+                <a:latin typeface="Century Gothic" panose="020B0502020202020204" pitchFamily="34" charset="0"/>
+              </a:rPr>
+              <a:t>Mensagens</a:t>
             </a:r>
           </a:p>
           <a:p>
